--- a/figures/biocoloop_framework_v3.pptx
+++ b/figures/biocoloop_framework_v3.pptx
@@ -3389,55 +3389,6 @@
           </a:prstGeom>
         </p:spPr>
       </p:pic>
-      <p:sp>
-        <p:nvSpPr>
-          <p:cNvPr id="288" name="Text 83">
-            <a:extLst>
-              <a:ext uri="{FF2B5EF4-FFF2-40B4-BE49-F238E27FC236}">
-                <a16:creationId xmlns:a16="http://schemas.microsoft.com/office/drawing/2014/main" id="{38594CA8-2966-4821-89A7-61E50203E74D}"/>
-              </a:ext>
-            </a:extLst>
-          </p:cNvPr>
-          <p:cNvSpPr>
-            <a:spLocks noGrp="1"/>
-          </p:cNvSpPr>
-          <p:nvPr/>
-        </p:nvSpPr>
-        <p:spPr>
-          <a:xfrm>
-            <a:off x="2245036" y="5153112"/>
-            <a:ext cx="2858871" cy="280813"/>
-          </a:xfrm>
-          <a:prstGeom prst="rect">
-            <a:avLst/>
-          </a:prstGeom>
-          <a:solidFill>
-            <a:srgbClr val="F2F8EE"/>
-          </a:solidFill>
-        </p:spPr>
-        <p:txBody>
-          <a:bodyPr wrap="square" lIns="19050" tIns="19050" rIns="19050" bIns="19050" anchor="ctr">
-            <a:noAutofit/>
-          </a:bodyPr>
-          <a:lstStyle/>
-          <a:p>
-            <a:pPr marL="0" indent="0" algn="ctr">
-              <a:buNone/>
-            </a:pPr>
-            <a:r>
-              <a:rPr sz="1238" i="1">
-                <a:solidFill>
-                  <a:srgbClr val="087A62"/>
-                </a:solidFill>
-                <a:latin typeface="Arial" panose="020B0604020202020204" pitchFamily="34" charset="0"/>
-                <a:ea typeface="Arial"/>
-                <a:cs typeface="Arial" panose="020B0604020202020204" pitchFamily="34" charset="0"/>
-              </a:rPr>
-              <a:t>Raw data remain within each laboratory</a:t>
-            </a:r>
-          </a:p>
-        </p:txBody>
-      </p:sp>
       <p:pic>
         <p:nvPicPr>
           <p:cNvPr id="289" name="图片 167">

--- a/figures/biocoloop_framework_v3.pptx
+++ b/figures/biocoloop_framework_v3.pptx
@@ -4032,7 +4032,7 @@
                 <a:ea typeface="Arial"/>
                 <a:cs typeface="Arial" panose="020B0604020202020204" pitchFamily="34" charset="0"/>
               </a:rPr>
-              <a:t>recipe</a:t>
+              <a:t>design</a:t>
             </a:r>
             <a:endParaRPr sz="1420">
               <a:solidFill>
@@ -6109,7 +6109,7 @@
                 <a:ea typeface="Arial"/>
                 <a:cs typeface="Arial" panose="020B0604020202020204" pitchFamily="34" charset="0"/>
               </a:rPr>
-              <a:t>design id</a:t>
+              <a:t>design_id</a:t>
             </a:r>
             <a:endParaRPr lang="en-US" sz="1100" b="1">
               <a:solidFill>

--- a/figures/biocoloop_framework_v3.pptx
+++ b/figures/biocoloop_framework_v3.pptx
@@ -3856,8 +3856,8 @@
         </p:nvSpPr>
         <p:spPr>
           <a:xfrm>
-            <a:off x="3144925" y="1173300"/>
-            <a:ext cx="2675902" cy="266700"/>
+            <a:off x="2850800" y="1116700"/>
+            <a:ext cx="3290000" cy="380000"/>
           </a:xfrm>
           <a:prstGeom prst="rect">
             <a:avLst/>
@@ -3873,6 +3873,9 @@
           <a:lstStyle/>
           <a:p>
             <a:pPr marL="0" indent="0" algn="ctr">
+              <a:lnSpc>
+                <a:spcPct val="100000"/>
+              </a:lnSpc>
               <a:buNone/>
             </a:pPr>
             <a:r>
@@ -3884,13 +3887,27 @@
                 <a:ea typeface="Arial"/>
                 <a:cs typeface="Arial" panose="020B0604020202020204" pitchFamily="34" charset="0"/>
               </a:rPr>
-              <a:t>Aggregated development evidence</a:t>
-            </a:r>
-            <a:endParaRPr sz="1400" i="1">
-              <a:latin typeface="Arial" panose="020B0604020202020204" pitchFamily="34" charset="0"/>
-              <a:ea typeface="Calibri"/>
-              <a:cs typeface="Arial" panose="020B0604020202020204" pitchFamily="34" charset="0"/>
-            </a:endParaRPr>
+              <a:t>Aggregated development evidence ℰₜ</a:t>
+            </a:r>
+          </a:p>
+          <a:p>
+            <a:pPr marL="0" indent="0" algn="ctr">
+              <a:lnSpc>
+                <a:spcPct val="100000"/>
+              </a:lnSpc>
+              <a:buNone/>
+            </a:pPr>
+            <a:r>
+              <a:rPr lang="en-US" sz="950" i="1">
+                <a:solidFill>
+                  <a:srgbClr val="0A51A1"/>
+                </a:solidFill>
+                <a:latin typeface="Arial" panose="020B0604020202020204" pitchFamily="34" charset="0"/>
+                <a:ea typeface="Arial"/>
+                <a:cs typeface="Arial" panose="020B0604020202020204" pitchFamily="34" charset="0"/>
+              </a:rPr>
+              <a:t>(configuration, dev score, decision)</a:t>
+            </a:r>
           </a:p>
         </p:txBody>
       </p:sp>
@@ -3976,8 +3993,8 @@
         </p:nvSpPr>
         <p:spPr>
           <a:xfrm>
-            <a:off x="4393952" y="2752438"/>
-            <a:ext cx="922457" cy="265424"/>
+            <a:off x="3810000" y="2600000"/>
+            <a:ext cx="1498600" cy="444500"/>
           </a:xfrm>
           <a:prstGeom prst="rect">
             <a:avLst/>
@@ -3997,7 +4014,7 @@
               <a:buNone/>
             </a:pPr>
             <a:r>
-              <a:rPr sz="1275">
+              <a:rPr lang="en-US" sz="1000">
                 <a:solidFill>
                   <a:srgbClr val="0A51A1"/>
                 </a:solidFill>
@@ -4007,14 +4024,6 @@
               </a:rPr>
               <a:t>Candidate</a:t>
             </a:r>
-            <a:endParaRPr lang="en-US" sz="1275">
-              <a:solidFill>
-                <a:srgbClr val="0A51A1"/>
-              </a:solidFill>
-              <a:latin typeface="Arial" panose="020B0604020202020204" pitchFamily="34" charset="0"/>
-              <a:ea typeface="Arial"/>
-              <a:cs typeface="Arial" panose="020B0604020202020204" pitchFamily="34" charset="0"/>
-            </a:endParaRPr>
           </a:p>
           <a:p>
             <a:pPr marL="0" indent="0" algn="ctr">
@@ -4024,7 +4033,7 @@
               <a:buNone/>
             </a:pPr>
             <a:r>
-              <a:rPr lang="en-US" sz="1275">
+              <a:rPr lang="en-US" sz="1000">
                 <a:solidFill>
                   <a:srgbClr val="0A51A1"/>
                 </a:solidFill>
@@ -4032,15 +4041,27 @@
                 <a:ea typeface="Arial"/>
                 <a:cs typeface="Arial" panose="020B0604020202020204" pitchFamily="34" charset="0"/>
               </a:rPr>
-              <a:t>design</a:t>
-            </a:r>
-            <a:endParaRPr sz="1420">
-              <a:solidFill>
-                <a:srgbClr val="0A51A1"/>
-              </a:solidFill>
-              <a:latin typeface="Arial" panose="020B0604020202020204" pitchFamily="34" charset="0"/>
-              <a:cs typeface="Arial" panose="020B0604020202020204" pitchFamily="34" charset="0"/>
-            </a:endParaRPr>
+              <a:t>model design and</a:t>
+            </a:r>
+          </a:p>
+          <a:p>
+            <a:pPr marL="0" indent="0" algn="ctr">
+              <a:lnSpc>
+                <a:spcPct val="100000"/>
+              </a:lnSpc>
+              <a:buNone/>
+            </a:pPr>
+            <a:r>
+              <a:rPr lang="en-US" sz="1000">
+                <a:solidFill>
+                  <a:srgbClr val="0A51A1"/>
+                </a:solidFill>
+                <a:latin typeface="Arial" panose="020B0604020202020204" pitchFamily="34" charset="0"/>
+                <a:ea typeface="Arial"/>
+                <a:cs typeface="Arial" panose="020B0604020202020204" pitchFamily="34" charset="0"/>
+              </a:rPr>
+              <a:t>training hyperparameters</a:t>
+            </a:r>
           </a:p>
         </p:txBody>
       </p:sp>
@@ -4060,8 +4081,8 @@
         </p:nvSpPr>
         <p:spPr>
           <a:xfrm>
-            <a:off x="5771504" y="2697068"/>
-            <a:ext cx="1161288" cy="393192"/>
+            <a:off x="5524500" y="2595700"/>
+            <a:ext cx="1206500" cy="596900"/>
           </a:xfrm>
           <a:prstGeom prst="rect">
             <a:avLst/>
@@ -4081,7 +4102,7 @@
               <a:buNone/>
             </a:pPr>
             <a:r>
-              <a:rPr sz="1275">
+              <a:rPr lang="en-US" sz="1275">
                 <a:solidFill>
                   <a:srgbClr val="087A62"/>
                 </a:solidFill>
@@ -4091,13 +4112,6 @@
               </a:rPr>
               <a:t>Development</a:t>
             </a:r>
-            <a:endParaRPr sz="1370">
-              <a:solidFill>
-                <a:srgbClr val="087A62"/>
-              </a:solidFill>
-              <a:latin typeface="Arial" panose="020B0604020202020204" pitchFamily="34" charset="0"/>
-              <a:cs typeface="Arial" panose="020B0604020202020204" pitchFamily="34" charset="0"/>
-            </a:endParaRPr>
           </a:p>
           <a:p>
             <a:pPr marL="0" indent="0" algn="ctr">
@@ -4107,7 +4121,7 @@
               <a:buNone/>
             </a:pPr>
             <a:r>
-              <a:rPr sz="1275">
+              <a:rPr lang="en-US" sz="1275">
                 <a:solidFill>
                   <a:srgbClr val="087A62"/>
                 </a:solidFill>
@@ -4115,15 +4129,27 @@
                 <a:ea typeface="Arial"/>
                 <a:cs typeface="Arial" panose="020B0604020202020204" pitchFamily="34" charset="0"/>
               </a:rPr>
-              <a:t>evidence</a:t>
-            </a:r>
-            <a:endParaRPr sz="1370">
-              <a:solidFill>
-                <a:srgbClr val="087A62"/>
-              </a:solidFill>
-              <a:latin typeface="Arial" panose="020B0604020202020204" pitchFamily="34" charset="0"/>
-              <a:cs typeface="Arial" panose="020B0604020202020204" pitchFamily="34" charset="0"/>
-            </a:endParaRPr>
+              <a:t>evidence ℰₜ</a:t>
+            </a:r>
+          </a:p>
+          <a:p>
+            <a:pPr marL="0" indent="0" algn="ctr">
+              <a:lnSpc>
+                <a:spcPct val="100000"/>
+              </a:lnSpc>
+              <a:buNone/>
+            </a:pPr>
+            <a:r>
+              <a:rPr lang="en-US" sz="950" i="1">
+                <a:solidFill>
+                  <a:srgbClr val="087A62"/>
+                </a:solidFill>
+                <a:latin typeface="Arial" panose="020B0604020202020204" pitchFamily="34" charset="0"/>
+                <a:ea typeface="Arial"/>
+                <a:cs typeface="Arial" panose="020B0604020202020204" pitchFamily="34" charset="0"/>
+              </a:rPr>
+              <a:t>(one card per trial)</a:t>
+            </a:r>
           </a:p>
         </p:txBody>
       </p:sp>
